--- a/curso_es/pptx/S34.pptx
+++ b/curso_es/pptx/S34.pptx
@@ -4213,7 +4213,7 @@
                 </a:solidFill>
                 <a:latin typeface="Nunito Sans"/>
               </a:rPr>
-              <a:t>A Dylan le llega: «¡Suspendidas las clases en Bizkaia por la nieve!». Nieva un poco y parece verdad.</a:t>
+              <a:t>A un chico le llega: «¡Suspendidas las clases en Bizkaia por la nieve!». Nieva un poco y parece verdad.</a:t>
             </a:r>
           </a:p>
         </p:txBody>
@@ -4831,7 +4831,7 @@
                 </a:solidFill>
                 <a:latin typeface="Nunito Sans"/>
               </a:rPr>
-              <a:t>Chen hace una búsqueda inversa de una foto de una manifestación en Bilbao. No aparece en ningún otro sitio. «Entonces es real y de hoy», piensa.</a:t>
+              <a:t>Un chico hace una búsqueda inversa de una foto de una manifestación en Bilbao. No aparece en ningún otro sitio. «Entonces es real y de hoy», piensa.</a:t>
             </a:r>
           </a:p>
         </p:txBody>
@@ -6154,7 +6154,7 @@
                 </a:solidFill>
                 <a:latin typeface="Nunito Sans"/>
               </a:rPr>
-              <a:t>Hoy un experimento como el de Milgram no estaría ______.  (sesión 29)</a:t>
+              <a:t>Hoy un experimento como el de las descargas no estaría ______.  (sesión 29)</a:t>
             </a:r>
           </a:p>
         </p:txBody>
@@ -6392,7 +6392,7 @@
                 </a:solidFill>
                 <a:latin typeface="Nunito Sans"/>
               </a:rPr>
-              <a:t>Hoy un experimento como el de Milgram no estaría </a:t>
+              <a:t>Hoy un experimento como el de las descargas no estaría </a:t>
             </a:r>
             <a:r>
               <a:rPr sz="2600" b="1">
